--- a/PD/LMS PROJECT PPT.pptx
+++ b/PD/LMS PROJECT PPT.pptx
@@ -51326,7 +51326,7 @@
           <a:p>
             <a:r>
               <a:rPr lang="en-US" dirty="0" smtClean="0"/>
-              <a:t>If student inputs wrong credential 3 or more times then it gives an option to recover the password:</a:t>
+              <a:t>If student inputs wrong credential 3 times then it gives options to either go back or recover the password:</a:t>
             </a:r>
             <a:endParaRPr lang="en-US" dirty="0" smtClean="0"/>
           </a:p>
